--- a/10 - Statistical Inference Tests/Analysis of Variance.pptx
+++ b/10 - Statistical Inference Tests/Analysis of Variance.pptx
@@ -5,7 +5,7 @@
     <p:sldMasterId id="2147483648" r:id="rId4"/>
   </p:sldMasterIdLst>
   <p:notesMasterIdLst>
-    <p:notesMasterId r:id="rId31"/>
+    <p:notesMasterId r:id="rId34"/>
   </p:notesMasterIdLst>
   <p:sldIdLst>
     <p:sldId id="257" r:id="rId5"/>
@@ -27,13 +27,16 @@
     <p:sldId id="328" r:id="rId21"/>
     <p:sldId id="329" r:id="rId22"/>
     <p:sldId id="330" r:id="rId23"/>
-    <p:sldId id="331" r:id="rId24"/>
-    <p:sldId id="332" r:id="rId25"/>
-    <p:sldId id="334" r:id="rId26"/>
-    <p:sldId id="335" r:id="rId27"/>
-    <p:sldId id="336" r:id="rId28"/>
-    <p:sldId id="337" r:id="rId29"/>
-    <p:sldId id="338" r:id="rId30"/>
+    <p:sldId id="342" r:id="rId24"/>
+    <p:sldId id="331" r:id="rId25"/>
+    <p:sldId id="339" r:id="rId26"/>
+    <p:sldId id="340" r:id="rId27"/>
+    <p:sldId id="332" r:id="rId28"/>
+    <p:sldId id="334" r:id="rId29"/>
+    <p:sldId id="335" r:id="rId30"/>
+    <p:sldId id="336" r:id="rId31"/>
+    <p:sldId id="337" r:id="rId32"/>
+    <p:sldId id="338" r:id="rId33"/>
   </p:sldIdLst>
   <p:sldSz cx="12192000" cy="6858000"/>
   <p:notesSz cx="6858000" cy="9144000"/>
@@ -482,7 +485,7 @@
           <a:p>
             <a:fld id="{F666E1FD-E7A0-497B-BBC0-740BAAC97C64}" type="datetimeFigureOut">
               <a:rPr lang="en-PH" smtClean="0"/>
-              <a:t>11/4/23</a:t>
+              <a:t>1/20/26</a:t>
             </a:fld>
             <a:endParaRPr lang="en-PH"/>
           </a:p>
@@ -1763,7 +1766,13 @@
   <p:cSld>
     <p:spTree>
       <p:nvGrpSpPr>
-        <p:cNvPr id="1" name=""/>
+        <p:cNvPr id="1" name="">
+          <a:extLst>
+            <a:ext uri="{FF2B5EF4-FFF2-40B4-BE49-F238E27FC236}">
+              <a16:creationId xmlns:a16="http://schemas.microsoft.com/office/drawing/2014/main" id="{2ED24200-E3A7-7C8F-B5A3-E3E6996077C5}"/>
+            </a:ext>
+          </a:extLst>
+        </p:cNvPr>
         <p:cNvGrpSpPr/>
         <p:nvPr/>
       </p:nvGrpSpPr>
@@ -1777,7 +1786,13 @@
       </p:grpSpPr>
       <p:sp>
         <p:nvSpPr>
-          <p:cNvPr id="2" name="Slide Image Placeholder 1"/>
+          <p:cNvPr id="2" name="Slide Image Placeholder 1">
+            <a:extLst>
+              <a:ext uri="{FF2B5EF4-FFF2-40B4-BE49-F238E27FC236}">
+                <a16:creationId xmlns:a16="http://schemas.microsoft.com/office/drawing/2014/main" id="{6EBF384F-EE42-A3E5-5AE3-FEC9EEE003ED}"/>
+              </a:ext>
+            </a:extLst>
+          </p:cNvPr>
           <p:cNvSpPr>
             <a:spLocks noGrp="1" noRot="1" noChangeAspect="1"/>
           </p:cNvSpPr>
@@ -1789,7 +1804,13 @@
       </p:sp>
       <p:sp>
         <p:nvSpPr>
-          <p:cNvPr id="3" name="Notes Placeholder 2"/>
+          <p:cNvPr id="3" name="Notes Placeholder 2">
+            <a:extLst>
+              <a:ext uri="{FF2B5EF4-FFF2-40B4-BE49-F238E27FC236}">
+                <a16:creationId xmlns:a16="http://schemas.microsoft.com/office/drawing/2014/main" id="{73E56AAA-6B10-B6DC-435F-E4B55D7D4A7B}"/>
+              </a:ext>
+            </a:extLst>
+          </p:cNvPr>
           <p:cNvSpPr>
             <a:spLocks noGrp="1"/>
           </p:cNvSpPr>
@@ -1808,7 +1829,13 @@
       </p:sp>
       <p:sp>
         <p:nvSpPr>
-          <p:cNvPr id="4" name="Slide Number Placeholder 3"/>
+          <p:cNvPr id="4" name="Slide Number Placeholder 3">
+            <a:extLst>
+              <a:ext uri="{FF2B5EF4-FFF2-40B4-BE49-F238E27FC236}">
+                <a16:creationId xmlns:a16="http://schemas.microsoft.com/office/drawing/2014/main" id="{FE3A1EAC-D66C-0157-8B6C-AA70AC42DC27}"/>
+              </a:ext>
+            </a:extLst>
+          </p:cNvPr>
           <p:cNvSpPr>
             <a:spLocks noGrp="1"/>
           </p:cNvSpPr>
@@ -1832,7 +1859,7 @@
     </p:spTree>
     <p:extLst>
       <p:ext uri="{BB962C8B-B14F-4D97-AF65-F5344CB8AC3E}">
-        <p14:creationId xmlns:p14="http://schemas.microsoft.com/office/powerpoint/2010/main" val="2089106439"/>
+        <p14:creationId xmlns:p14="http://schemas.microsoft.com/office/powerpoint/2010/main" val="3940061195"/>
       </p:ext>
     </p:extLst>
   </p:cSld>
@@ -1916,7 +1943,7 @@
     </p:spTree>
     <p:extLst>
       <p:ext uri="{BB962C8B-B14F-4D97-AF65-F5344CB8AC3E}">
-        <p14:creationId xmlns:p14="http://schemas.microsoft.com/office/powerpoint/2010/main" val="872489447"/>
+        <p14:creationId xmlns:p14="http://schemas.microsoft.com/office/powerpoint/2010/main" val="2089106439"/>
       </p:ext>
     </p:extLst>
   </p:cSld>
@@ -1991,7 +2018,7 @@
           <a:p>
             <a:fld id="{FE90CCE9-4AAE-4E1F-85AD-521A406D6524}" type="slidenum">
               <a:rPr lang="en-PH" smtClean="0"/>
-              <a:t>22</a:t>
+              <a:t>24</a:t>
             </a:fld>
             <a:endParaRPr lang="en-PH"/>
           </a:p>
@@ -2000,7 +2027,7 @@
     </p:spTree>
     <p:extLst>
       <p:ext uri="{BB962C8B-B14F-4D97-AF65-F5344CB8AC3E}">
-        <p14:creationId xmlns:p14="http://schemas.microsoft.com/office/powerpoint/2010/main" val="3548507445"/>
+        <p14:creationId xmlns:p14="http://schemas.microsoft.com/office/powerpoint/2010/main" val="872489447"/>
       </p:ext>
     </p:extLst>
   </p:cSld>
@@ -2075,7 +2102,7 @@
           <a:p>
             <a:fld id="{FE90CCE9-4AAE-4E1F-85AD-521A406D6524}" type="slidenum">
               <a:rPr lang="en-PH" smtClean="0"/>
-              <a:t>23</a:t>
+              <a:t>25</a:t>
             </a:fld>
             <a:endParaRPr lang="en-PH"/>
           </a:p>
@@ -2084,7 +2111,7 @@
     </p:spTree>
     <p:extLst>
       <p:ext uri="{BB962C8B-B14F-4D97-AF65-F5344CB8AC3E}">
-        <p14:creationId xmlns:p14="http://schemas.microsoft.com/office/powerpoint/2010/main" val="1166972231"/>
+        <p14:creationId xmlns:p14="http://schemas.microsoft.com/office/powerpoint/2010/main" val="3548507445"/>
       </p:ext>
     </p:extLst>
   </p:cSld>
@@ -2159,7 +2186,7 @@
           <a:p>
             <a:fld id="{FE90CCE9-4AAE-4E1F-85AD-521A406D6524}" type="slidenum">
               <a:rPr lang="en-PH" smtClean="0"/>
-              <a:t>24</a:t>
+              <a:t>26</a:t>
             </a:fld>
             <a:endParaRPr lang="en-PH"/>
           </a:p>
@@ -2168,7 +2195,7 @@
     </p:spTree>
     <p:extLst>
       <p:ext uri="{BB962C8B-B14F-4D97-AF65-F5344CB8AC3E}">
-        <p14:creationId xmlns:p14="http://schemas.microsoft.com/office/powerpoint/2010/main" val="2198735513"/>
+        <p14:creationId xmlns:p14="http://schemas.microsoft.com/office/powerpoint/2010/main" val="1166972231"/>
       </p:ext>
     </p:extLst>
   </p:cSld>
@@ -2243,7 +2270,7 @@
           <a:p>
             <a:fld id="{FE90CCE9-4AAE-4E1F-85AD-521A406D6524}" type="slidenum">
               <a:rPr lang="en-PH" smtClean="0"/>
-              <a:t>25</a:t>
+              <a:t>27</a:t>
             </a:fld>
             <a:endParaRPr lang="en-PH"/>
           </a:p>
@@ -2252,7 +2279,7 @@
     </p:spTree>
     <p:extLst>
       <p:ext uri="{BB962C8B-B14F-4D97-AF65-F5344CB8AC3E}">
-        <p14:creationId xmlns:p14="http://schemas.microsoft.com/office/powerpoint/2010/main" val="2536262130"/>
+        <p14:creationId xmlns:p14="http://schemas.microsoft.com/office/powerpoint/2010/main" val="2198735513"/>
       </p:ext>
     </p:extLst>
   </p:cSld>
@@ -2327,7 +2354,91 @@
           <a:p>
             <a:fld id="{FE90CCE9-4AAE-4E1F-85AD-521A406D6524}" type="slidenum">
               <a:rPr lang="en-PH" smtClean="0"/>
-              <a:t>26</a:t>
+              <a:t>28</a:t>
+            </a:fld>
+            <a:endParaRPr lang="en-PH"/>
+          </a:p>
+        </p:txBody>
+      </p:sp>
+    </p:spTree>
+    <p:extLst>
+      <p:ext uri="{BB962C8B-B14F-4D97-AF65-F5344CB8AC3E}">
+        <p14:creationId xmlns:p14="http://schemas.microsoft.com/office/powerpoint/2010/main" val="2536262130"/>
+      </p:ext>
+    </p:extLst>
+  </p:cSld>
+  <p:clrMapOvr>
+    <a:masterClrMapping/>
+  </p:clrMapOvr>
+</p:notes>
+</file>
+
+<file path=ppt/notesSlides/notesSlide27.xml><?xml version="1.0" encoding="utf-8"?>
+<p:notes xmlns:a="http://schemas.openxmlformats.org/drawingml/2006/main" xmlns:r="http://schemas.openxmlformats.org/officeDocument/2006/relationships" xmlns:p="http://schemas.openxmlformats.org/presentationml/2006/main">
+  <p:cSld>
+    <p:spTree>
+      <p:nvGrpSpPr>
+        <p:cNvPr id="1" name=""/>
+        <p:cNvGrpSpPr/>
+        <p:nvPr/>
+      </p:nvGrpSpPr>
+      <p:grpSpPr>
+        <a:xfrm>
+          <a:off x="0" y="0"/>
+          <a:ext cx="0" cy="0"/>
+          <a:chOff x="0" y="0"/>
+          <a:chExt cx="0" cy="0"/>
+        </a:xfrm>
+      </p:grpSpPr>
+      <p:sp>
+        <p:nvSpPr>
+          <p:cNvPr id="2" name="Slide Image Placeholder 1"/>
+          <p:cNvSpPr>
+            <a:spLocks noGrp="1" noRot="1" noChangeAspect="1"/>
+          </p:cNvSpPr>
+          <p:nvPr>
+            <p:ph type="sldImg"/>
+          </p:nvPr>
+        </p:nvSpPr>
+        <p:spPr/>
+      </p:sp>
+      <p:sp>
+        <p:nvSpPr>
+          <p:cNvPr id="3" name="Notes Placeholder 2"/>
+          <p:cNvSpPr>
+            <a:spLocks noGrp="1"/>
+          </p:cNvSpPr>
+          <p:nvPr>
+            <p:ph type="body" idx="1"/>
+          </p:nvPr>
+        </p:nvSpPr>
+        <p:spPr/>
+        <p:txBody>
+          <a:bodyPr/>
+          <a:lstStyle/>
+          <a:p>
+            <a:endParaRPr lang="en-PH" dirty="0"/>
+          </a:p>
+        </p:txBody>
+      </p:sp>
+      <p:sp>
+        <p:nvSpPr>
+          <p:cNvPr id="4" name="Slide Number Placeholder 3"/>
+          <p:cNvSpPr>
+            <a:spLocks noGrp="1"/>
+          </p:cNvSpPr>
+          <p:nvPr>
+            <p:ph type="sldNum" sz="quarter" idx="5"/>
+          </p:nvPr>
+        </p:nvSpPr>
+        <p:spPr/>
+        <p:txBody>
+          <a:bodyPr/>
+          <a:lstStyle/>
+          <a:p>
+            <a:fld id="{FE90CCE9-4AAE-4E1F-85AD-521A406D6524}" type="slidenum">
+              <a:rPr lang="en-PH" smtClean="0"/>
+              <a:t>29</a:t>
             </a:fld>
             <a:endParaRPr lang="en-PH"/>
           </a:p>
@@ -3083,7 +3194,7 @@
           <a:p>
             <a:fld id="{0CCF0B81-6BD8-4C65-9459-815598C5F1F4}" type="datetimeFigureOut">
               <a:rPr lang="en-PH" smtClean="0"/>
-              <a:t>11/4/23</a:t>
+              <a:t>1/20/26</a:t>
             </a:fld>
             <a:endParaRPr lang="en-PH"/>
           </a:p>
@@ -3283,7 +3394,7 @@
           <a:p>
             <a:fld id="{0CCF0B81-6BD8-4C65-9459-815598C5F1F4}" type="datetimeFigureOut">
               <a:rPr lang="en-PH" smtClean="0"/>
-              <a:t>11/4/23</a:t>
+              <a:t>1/20/26</a:t>
             </a:fld>
             <a:endParaRPr lang="en-PH"/>
           </a:p>
@@ -3493,7 +3604,7 @@
           <a:p>
             <a:fld id="{0CCF0B81-6BD8-4C65-9459-815598C5F1F4}" type="datetimeFigureOut">
               <a:rPr lang="en-PH" smtClean="0"/>
-              <a:t>11/4/23</a:t>
+              <a:t>1/20/26</a:t>
             </a:fld>
             <a:endParaRPr lang="en-PH"/>
           </a:p>
@@ -3693,7 +3804,7 @@
           <a:p>
             <a:fld id="{0CCF0B81-6BD8-4C65-9459-815598C5F1F4}" type="datetimeFigureOut">
               <a:rPr lang="en-PH" smtClean="0"/>
-              <a:t>11/4/23</a:t>
+              <a:t>1/20/26</a:t>
             </a:fld>
             <a:endParaRPr lang="en-PH"/>
           </a:p>
@@ -3969,7 +4080,7 @@
           <a:p>
             <a:fld id="{0CCF0B81-6BD8-4C65-9459-815598C5F1F4}" type="datetimeFigureOut">
               <a:rPr lang="en-PH" smtClean="0"/>
-              <a:t>11/4/23</a:t>
+              <a:t>1/20/26</a:t>
             </a:fld>
             <a:endParaRPr lang="en-PH"/>
           </a:p>
@@ -4237,7 +4348,7 @@
           <a:p>
             <a:fld id="{0CCF0B81-6BD8-4C65-9459-815598C5F1F4}" type="datetimeFigureOut">
               <a:rPr lang="en-PH" smtClean="0"/>
-              <a:t>11/4/23</a:t>
+              <a:t>1/20/26</a:t>
             </a:fld>
             <a:endParaRPr lang="en-PH"/>
           </a:p>
@@ -4652,7 +4763,7 @@
           <a:p>
             <a:fld id="{0CCF0B81-6BD8-4C65-9459-815598C5F1F4}" type="datetimeFigureOut">
               <a:rPr lang="en-PH" smtClean="0"/>
-              <a:t>11/4/23</a:t>
+              <a:t>1/20/26</a:t>
             </a:fld>
             <a:endParaRPr lang="en-PH"/>
           </a:p>
@@ -4794,7 +4905,7 @@
           <a:p>
             <a:fld id="{0CCF0B81-6BD8-4C65-9459-815598C5F1F4}" type="datetimeFigureOut">
               <a:rPr lang="en-PH" smtClean="0"/>
-              <a:t>11/4/23</a:t>
+              <a:t>1/20/26</a:t>
             </a:fld>
             <a:endParaRPr lang="en-PH"/>
           </a:p>
@@ -4907,7 +5018,7 @@
           <a:p>
             <a:fld id="{0CCF0B81-6BD8-4C65-9459-815598C5F1F4}" type="datetimeFigureOut">
               <a:rPr lang="en-PH" smtClean="0"/>
-              <a:t>11/4/23</a:t>
+              <a:t>1/20/26</a:t>
             </a:fld>
             <a:endParaRPr lang="en-PH"/>
           </a:p>
@@ -5220,7 +5331,7 @@
           <a:p>
             <a:fld id="{0CCF0B81-6BD8-4C65-9459-815598C5F1F4}" type="datetimeFigureOut">
               <a:rPr lang="en-PH" smtClean="0"/>
-              <a:t>11/4/23</a:t>
+              <a:t>1/20/26</a:t>
             </a:fld>
             <a:endParaRPr lang="en-PH"/>
           </a:p>
@@ -5509,7 +5620,7 @@
           <a:p>
             <a:fld id="{0CCF0B81-6BD8-4C65-9459-815598C5F1F4}" type="datetimeFigureOut">
               <a:rPr lang="en-PH" smtClean="0"/>
-              <a:t>11/4/23</a:t>
+              <a:t>1/20/26</a:t>
             </a:fld>
             <a:endParaRPr lang="en-PH"/>
           </a:p>
@@ -5752,7 +5863,7 @@
           <a:p>
             <a:fld id="{0CCF0B81-6BD8-4C65-9459-815598C5F1F4}" type="datetimeFigureOut">
               <a:rPr lang="en-PH" smtClean="0"/>
-              <a:t>11/4/23</a:t>
+              <a:t>1/20/26</a:t>
             </a:fld>
             <a:endParaRPr lang="en-PH"/>
           </a:p>
@@ -10733,7 +10844,7 @@
             </a:r>
             <a:r>
               <a:rPr lang="en-PH" sz="2600" dirty="0"/>
-              <a:t> that the type of drink does not an effect on a person’s reaction time.</a:t>
+              <a:t> that the type of drink does not have an effect on a person’s reaction time.</a:t>
             </a:r>
           </a:p>
         </p:txBody>
@@ -17841,6 +17952,964 @@
 </file>
 
 <file path=ppt/slides/slide20.xml><?xml version="1.0" encoding="utf-8"?>
+<p:sld xmlns:a="http://schemas.openxmlformats.org/drawingml/2006/main" xmlns:r="http://schemas.openxmlformats.org/officeDocument/2006/relationships" xmlns:p="http://schemas.openxmlformats.org/presentationml/2006/main">
+  <p:cSld>
+    <p:bg>
+      <p:bgPr>
+        <a:blipFill dpi="0" rotWithShape="1">
+          <a:blip r:embed="rId3">
+            <a:alphaModFix amt="99000"/>
+            <a:lum/>
+          </a:blip>
+          <a:srcRect/>
+          <a:stretch>
+            <a:fillRect t="89000" r="85000" b="-1000"/>
+          </a:stretch>
+        </a:blipFill>
+        <a:effectLst/>
+      </p:bgPr>
+    </p:bg>
+    <p:spTree>
+      <p:nvGrpSpPr>
+        <p:cNvPr id="1" name="">
+          <a:extLst>
+            <a:ext uri="{FF2B5EF4-FFF2-40B4-BE49-F238E27FC236}">
+              <a16:creationId xmlns:a16="http://schemas.microsoft.com/office/drawing/2014/main" id="{CA3DF735-B67C-3A44-A025-16EBD68F9FDD}"/>
+            </a:ext>
+          </a:extLst>
+        </p:cNvPr>
+        <p:cNvGrpSpPr/>
+        <p:nvPr/>
+      </p:nvGrpSpPr>
+      <p:grpSpPr>
+        <a:xfrm>
+          <a:off x="0" y="0"/>
+          <a:ext cx="0" cy="0"/>
+          <a:chOff x="0" y="0"/>
+          <a:chExt cx="0" cy="0"/>
+        </a:xfrm>
+      </p:grpSpPr>
+      <p:sp>
+        <p:nvSpPr>
+          <p:cNvPr id="5" name="Title 1">
+            <a:extLst>
+              <a:ext uri="{FF2B5EF4-FFF2-40B4-BE49-F238E27FC236}">
+                <a16:creationId xmlns:a16="http://schemas.microsoft.com/office/drawing/2014/main" id="{7684FBC3-9101-6EE9-CBC9-3EA133A5CF2B}"/>
+              </a:ext>
+            </a:extLst>
+          </p:cNvPr>
+          <p:cNvSpPr txBox="1">
+            <a:spLocks/>
+          </p:cNvSpPr>
+          <p:nvPr/>
+        </p:nvSpPr>
+        <p:spPr>
+          <a:xfrm>
+            <a:off x="1524000" y="1516449"/>
+            <a:ext cx="9144000" cy="4290585"/>
+          </a:xfrm>
+          <a:prstGeom prst="rect">
+            <a:avLst/>
+          </a:prstGeom>
+        </p:spPr>
+        <p:txBody>
+          <a:bodyPr vert="horz" lIns="91440" tIns="45720" rIns="91440" bIns="45720" rtlCol="0" anchor="b">
+            <a:normAutofit fontScale="97500"/>
+          </a:bodyPr>
+          <a:lstStyle>
+            <a:lvl1pPr algn="ctr" defTabSz="914400" rtl="0" eaLnBrk="1" latinLnBrk="0" hangingPunct="1">
+              <a:lnSpc>
+                <a:spcPct val="90000"/>
+              </a:lnSpc>
+              <a:spcBef>
+                <a:spcPct val="0"/>
+              </a:spcBef>
+              <a:buNone/>
+              <a:defRPr sz="6000" kern="1200">
+                <a:solidFill>
+                  <a:schemeClr val="tx1"/>
+                </a:solidFill>
+                <a:latin typeface="+mj-lt"/>
+                <a:ea typeface="+mj-ea"/>
+                <a:cs typeface="+mj-cs"/>
+              </a:defRPr>
+            </a:lvl1pPr>
+          </a:lstStyle>
+          <a:p>
+            <a:pPr algn="l"/>
+            <a:endParaRPr lang="en-US" sz="3100" dirty="0"/>
+          </a:p>
+          <a:p>
+            <a:pPr algn="l"/>
+            <a:endParaRPr lang="en-US" sz="3100" dirty="0"/>
+          </a:p>
+          <a:p>
+            <a:pPr algn="l"/>
+            <a:endParaRPr lang="en-US" sz="3100" dirty="0"/>
+          </a:p>
+          <a:p>
+            <a:pPr algn="l"/>
+            <a:endParaRPr lang="en-US" sz="3100" dirty="0"/>
+          </a:p>
+          <a:p>
+            <a:pPr algn="l"/>
+            <a:endParaRPr lang="en-US" sz="3000" dirty="0"/>
+          </a:p>
+          <a:p>
+            <a:pPr algn="l"/>
+            <a:endParaRPr lang="en-US" sz="3000" dirty="0"/>
+          </a:p>
+        </p:txBody>
+      </p:sp>
+      <p:sp>
+        <p:nvSpPr>
+          <p:cNvPr id="38" name="Title 1">
+            <a:extLst>
+              <a:ext uri="{FF2B5EF4-FFF2-40B4-BE49-F238E27FC236}">
+                <a16:creationId xmlns:a16="http://schemas.microsoft.com/office/drawing/2014/main" id="{27C424F9-EE9D-17F7-53FF-73748D7EB537}"/>
+              </a:ext>
+            </a:extLst>
+          </p:cNvPr>
+          <p:cNvSpPr>
+            <a:spLocks noGrp="1"/>
+          </p:cNvSpPr>
+          <p:nvPr>
+            <p:ph type="ctrTitle"/>
+          </p:nvPr>
+        </p:nvSpPr>
+        <p:spPr>
+          <a:xfrm>
+            <a:off x="1128386" y="415731"/>
+            <a:ext cx="9935227" cy="718459"/>
+          </a:xfrm>
+        </p:spPr>
+        <p:txBody>
+          <a:bodyPr>
+            <a:noAutofit/>
+          </a:bodyPr>
+          <a:lstStyle/>
+          <a:p>
+            <a:r>
+              <a:rPr lang="en-US" sz="5000" b="1" dirty="0"/>
+              <a:t>Degree of Freedom</a:t>
+            </a:r>
+            <a:endParaRPr lang="en-PH" sz="5000" b="1" dirty="0"/>
+          </a:p>
+        </p:txBody>
+      </p:sp>
+      <p:sp>
+        <p:nvSpPr>
+          <p:cNvPr id="39" name="Footer Placeholder 3">
+            <a:extLst>
+              <a:ext uri="{FF2B5EF4-FFF2-40B4-BE49-F238E27FC236}">
+                <a16:creationId xmlns:a16="http://schemas.microsoft.com/office/drawing/2014/main" id="{711F3076-5B9F-92FF-FA78-4A28E3E80EC7}"/>
+              </a:ext>
+            </a:extLst>
+          </p:cNvPr>
+          <p:cNvSpPr>
+            <a:spLocks noGrp="1"/>
+          </p:cNvSpPr>
+          <p:nvPr>
+            <p:ph type="ftr" sz="quarter" idx="11"/>
+          </p:nvPr>
+        </p:nvSpPr>
+        <p:spPr>
+          <a:xfrm>
+            <a:off x="0" y="6139541"/>
+            <a:ext cx="12192000" cy="718459"/>
+          </a:xfrm>
+          <a:ln w="28575">
+            <a:solidFill>
+              <a:schemeClr val="accent5">
+                <a:lumMod val="50000"/>
+              </a:schemeClr>
+            </a:solidFill>
+          </a:ln>
+        </p:spPr>
+        <p:txBody>
+          <a:bodyPr/>
+          <a:lstStyle/>
+          <a:p>
+            <a:pPr lvl="1" algn="r"/>
+            <a:r>
+              <a:rPr lang="en-US" sz="1200" b="1" dirty="0"/>
+              <a:t>CCDATS1L</a:t>
+            </a:r>
+            <a:endParaRPr lang="en-PH" sz="1200" b="1" dirty="0"/>
+          </a:p>
+        </p:txBody>
+      </p:sp>
+      <p:graphicFrame>
+        <p:nvGraphicFramePr>
+          <p:cNvPr id="2" name="Table 1">
+            <a:extLst>
+              <a:ext uri="{FF2B5EF4-FFF2-40B4-BE49-F238E27FC236}">
+                <a16:creationId xmlns:a16="http://schemas.microsoft.com/office/drawing/2014/main" id="{CD9C3C0F-5118-3FC5-2526-1D242D716DE6}"/>
+              </a:ext>
+            </a:extLst>
+          </p:cNvPr>
+          <p:cNvGraphicFramePr>
+            <a:graphicFrameLocks noGrp="1"/>
+          </p:cNvGraphicFramePr>
+          <p:nvPr/>
+        </p:nvGraphicFramePr>
+        <p:xfrm>
+          <a:off x="2031999" y="1696305"/>
+          <a:ext cx="8127999" cy="2225040"/>
+        </p:xfrm>
+        <a:graphic>
+          <a:graphicData uri="http://schemas.openxmlformats.org/drawingml/2006/table">
+            <a:tbl>
+              <a:tblPr firstRow="1" bandRow="1">
+                <a:tableStyleId>{7E9639D4-E3E2-4D34-9284-5A2195B3D0D7}</a:tableStyleId>
+              </a:tblPr>
+              <a:tblGrid>
+                <a:gridCol w="2709333">
+                  <a:extLst>
+                    <a:ext uri="{9D8B030D-6E8A-4147-A177-3AD203B41FA5}">
+                      <a16:colId xmlns:a16="http://schemas.microsoft.com/office/drawing/2014/main" val="535345936"/>
+                    </a:ext>
+                  </a:extLst>
+                </a:gridCol>
+                <a:gridCol w="2709333">
+                  <a:extLst>
+                    <a:ext uri="{9D8B030D-6E8A-4147-A177-3AD203B41FA5}">
+                      <a16:colId xmlns:a16="http://schemas.microsoft.com/office/drawing/2014/main" val="4136252206"/>
+                    </a:ext>
+                  </a:extLst>
+                </a:gridCol>
+                <a:gridCol w="2709333">
+                  <a:extLst>
+                    <a:ext uri="{9D8B030D-6E8A-4147-A177-3AD203B41FA5}">
+                      <a16:colId xmlns:a16="http://schemas.microsoft.com/office/drawing/2014/main" val="1539968642"/>
+                    </a:ext>
+                  </a:extLst>
+                </a:gridCol>
+              </a:tblGrid>
+              <a:tr h="370840">
+                <a:tc>
+                  <a:txBody>
+                    <a:bodyPr/>
+                    <a:lstStyle/>
+                    <a:p>
+                      <a:pPr algn="ctr"/>
+                      <a:r>
+                        <a:rPr lang="en-US" dirty="0"/>
+                        <a:t>Water </a:t>
+                      </a:r>
+                    </a:p>
+                  </a:txBody>
+                  <a:tcPr/>
+                </a:tc>
+                <a:tc>
+                  <a:txBody>
+                    <a:bodyPr/>
+                    <a:lstStyle/>
+                    <a:p>
+                      <a:pPr algn="ctr"/>
+                      <a:r>
+                        <a:rPr lang="en-US" dirty="0"/>
+                        <a:t>Juice</a:t>
+                      </a:r>
+                    </a:p>
+                  </a:txBody>
+                  <a:tcPr/>
+                </a:tc>
+                <a:tc>
+                  <a:txBody>
+                    <a:bodyPr/>
+                    <a:lstStyle/>
+                    <a:p>
+                      <a:pPr algn="ctr"/>
+                      <a:r>
+                        <a:rPr lang="en-US" dirty="0"/>
+                        <a:t>Coffee</a:t>
+                      </a:r>
+                    </a:p>
+                  </a:txBody>
+                  <a:tcPr/>
+                </a:tc>
+                <a:extLst>
+                  <a:ext uri="{0D108BD9-81ED-4DB2-BD59-A6C34878D82A}">
+                    <a16:rowId xmlns:a16="http://schemas.microsoft.com/office/drawing/2014/main" val="1352223750"/>
+                  </a:ext>
+                </a:extLst>
+              </a:tr>
+              <a:tr h="370840">
+                <a:tc>
+                  <a:txBody>
+                    <a:bodyPr/>
+                    <a:lstStyle/>
+                    <a:p>
+                      <a:pPr algn="ctr"/>
+                      <a:r>
+                        <a:rPr lang="en-US" dirty="0"/>
+                        <a:t>29</a:t>
+                      </a:r>
+                    </a:p>
+                  </a:txBody>
+                  <a:tcPr/>
+                </a:tc>
+                <a:tc>
+                  <a:txBody>
+                    <a:bodyPr/>
+                    <a:lstStyle/>
+                    <a:p>
+                      <a:pPr algn="ctr"/>
+                      <a:r>
+                        <a:rPr lang="en-US" dirty="0"/>
+                        <a:t>28</a:t>
+                      </a:r>
+                    </a:p>
+                  </a:txBody>
+                  <a:tcPr/>
+                </a:tc>
+                <a:tc>
+                  <a:txBody>
+                    <a:bodyPr/>
+                    <a:lstStyle/>
+                    <a:p>
+                      <a:pPr algn="ctr"/>
+                      <a:r>
+                        <a:rPr lang="en-US" dirty="0"/>
+                        <a:t>25</a:t>
+                      </a:r>
+                    </a:p>
+                  </a:txBody>
+                  <a:tcPr/>
+                </a:tc>
+                <a:extLst>
+                  <a:ext uri="{0D108BD9-81ED-4DB2-BD59-A6C34878D82A}">
+                    <a16:rowId xmlns:a16="http://schemas.microsoft.com/office/drawing/2014/main" val="720372481"/>
+                  </a:ext>
+                </a:extLst>
+              </a:tr>
+              <a:tr h="370840">
+                <a:tc>
+                  <a:txBody>
+                    <a:bodyPr/>
+                    <a:lstStyle/>
+                    <a:p>
+                      <a:pPr algn="ctr"/>
+                      <a:r>
+                        <a:rPr lang="en-US" dirty="0"/>
+                        <a:t>30</a:t>
+                      </a:r>
+                    </a:p>
+                  </a:txBody>
+                  <a:tcPr/>
+                </a:tc>
+                <a:tc>
+                  <a:txBody>
+                    <a:bodyPr/>
+                    <a:lstStyle/>
+                    <a:p>
+                      <a:pPr algn="ctr"/>
+                      <a:r>
+                        <a:rPr lang="en-US" dirty="0"/>
+                        <a:t>29</a:t>
+                      </a:r>
+                    </a:p>
+                  </a:txBody>
+                  <a:tcPr/>
+                </a:tc>
+                <a:tc>
+                  <a:txBody>
+                    <a:bodyPr/>
+                    <a:lstStyle/>
+                    <a:p>
+                      <a:pPr algn="ctr"/>
+                      <a:r>
+                        <a:rPr lang="en-US" dirty="0"/>
+                        <a:t>28</a:t>
+                      </a:r>
+                    </a:p>
+                  </a:txBody>
+                  <a:tcPr/>
+                </a:tc>
+                <a:extLst>
+                  <a:ext uri="{0D108BD9-81ED-4DB2-BD59-A6C34878D82A}">
+                    <a16:rowId xmlns:a16="http://schemas.microsoft.com/office/drawing/2014/main" val="1446411567"/>
+                  </a:ext>
+                </a:extLst>
+              </a:tr>
+              <a:tr h="370840">
+                <a:tc>
+                  <a:txBody>
+                    <a:bodyPr/>
+                    <a:lstStyle/>
+                    <a:p>
+                      <a:pPr algn="ctr"/>
+                      <a:r>
+                        <a:rPr lang="en-US" dirty="0"/>
+                        <a:t>31</a:t>
+                      </a:r>
+                    </a:p>
+                  </a:txBody>
+                  <a:tcPr/>
+                </a:tc>
+                <a:tc>
+                  <a:txBody>
+                    <a:bodyPr/>
+                    <a:lstStyle/>
+                    <a:p>
+                      <a:pPr algn="ctr"/>
+                      <a:r>
+                        <a:rPr lang="en-US" dirty="0"/>
+                        <a:t>27</a:t>
+                      </a:r>
+                    </a:p>
+                  </a:txBody>
+                  <a:tcPr/>
+                </a:tc>
+                <a:tc>
+                  <a:txBody>
+                    <a:bodyPr/>
+                    <a:lstStyle/>
+                    <a:p>
+                      <a:pPr algn="ctr"/>
+                      <a:r>
+                        <a:rPr lang="en-US" dirty="0"/>
+                        <a:t>29</a:t>
+                      </a:r>
+                    </a:p>
+                  </a:txBody>
+                  <a:tcPr/>
+                </a:tc>
+                <a:extLst>
+                  <a:ext uri="{0D108BD9-81ED-4DB2-BD59-A6C34878D82A}">
+                    <a16:rowId xmlns:a16="http://schemas.microsoft.com/office/drawing/2014/main" val="3638601036"/>
+                  </a:ext>
+                </a:extLst>
+              </a:tr>
+              <a:tr h="370840">
+                <a:tc>
+                  <a:txBody>
+                    <a:bodyPr/>
+                    <a:lstStyle/>
+                    <a:p>
+                      <a:pPr algn="ctr"/>
+                      <a:r>
+                        <a:rPr lang="en-US" dirty="0"/>
+                        <a:t>31</a:t>
+                      </a:r>
+                    </a:p>
+                  </a:txBody>
+                  <a:tcPr/>
+                </a:tc>
+                <a:tc>
+                  <a:txBody>
+                    <a:bodyPr/>
+                    <a:lstStyle/>
+                    <a:p>
+                      <a:pPr algn="ctr"/>
+                      <a:r>
+                        <a:rPr lang="en-US" dirty="0"/>
+                        <a:t>30</a:t>
+                      </a:r>
+                    </a:p>
+                  </a:txBody>
+                  <a:tcPr/>
+                </a:tc>
+                <a:tc>
+                  <a:txBody>
+                    <a:bodyPr/>
+                    <a:lstStyle/>
+                    <a:p>
+                      <a:pPr algn="ctr"/>
+                      <a:r>
+                        <a:rPr lang="en-US" dirty="0"/>
+                        <a:t>27</a:t>
+                      </a:r>
+                    </a:p>
+                  </a:txBody>
+                  <a:tcPr/>
+                </a:tc>
+                <a:extLst>
+                  <a:ext uri="{0D108BD9-81ED-4DB2-BD59-A6C34878D82A}">
+                    <a16:rowId xmlns:a16="http://schemas.microsoft.com/office/drawing/2014/main" val="3504778976"/>
+                  </a:ext>
+                </a:extLst>
+              </a:tr>
+              <a:tr h="370840">
+                <a:tc>
+                  <a:txBody>
+                    <a:bodyPr/>
+                    <a:lstStyle/>
+                    <a:p>
+                      <a:pPr algn="ctr"/>
+                      <a:r>
+                        <a:rPr lang="en-US" dirty="0"/>
+                        <a:t>29</a:t>
+                      </a:r>
+                    </a:p>
+                  </a:txBody>
+                  <a:tcPr/>
+                </a:tc>
+                <a:tc>
+                  <a:txBody>
+                    <a:bodyPr/>
+                    <a:lstStyle/>
+                    <a:p>
+                      <a:pPr algn="ctr"/>
+                      <a:r>
+                        <a:rPr lang="en-US" dirty="0"/>
+                        <a:t>29</a:t>
+                      </a:r>
+                    </a:p>
+                  </a:txBody>
+                  <a:tcPr/>
+                </a:tc>
+                <a:tc>
+                  <a:txBody>
+                    <a:bodyPr/>
+                    <a:lstStyle/>
+                    <a:p>
+                      <a:pPr algn="ctr"/>
+                      <a:r>
+                        <a:rPr lang="en-US" dirty="0"/>
+                        <a:t>29</a:t>
+                      </a:r>
+                    </a:p>
+                  </a:txBody>
+                  <a:tcPr/>
+                </a:tc>
+                <a:extLst>
+                  <a:ext uri="{0D108BD9-81ED-4DB2-BD59-A6C34878D82A}">
+                    <a16:rowId xmlns:a16="http://schemas.microsoft.com/office/drawing/2014/main" val="2229502472"/>
+                  </a:ext>
+                </a:extLst>
+              </a:tr>
+            </a:tbl>
+          </a:graphicData>
+        </a:graphic>
+      </p:graphicFrame>
+      <mc:AlternateContent xmlns:mc="http://schemas.openxmlformats.org/markup-compatibility/2006">
+        <mc:Choice xmlns:a14="http://schemas.microsoft.com/office/drawing/2010/main" Requires="a14">
+          <p:sp>
+            <p:nvSpPr>
+              <p:cNvPr id="10" name="TextBox 9">
+                <a:extLst>
+                  <a:ext uri="{FF2B5EF4-FFF2-40B4-BE49-F238E27FC236}">
+                    <a16:creationId xmlns:a16="http://schemas.microsoft.com/office/drawing/2014/main" id="{D4259C0B-CDAB-D03B-66A4-B501E1A7F801}"/>
+                  </a:ext>
+                </a:extLst>
+              </p:cNvPr>
+              <p:cNvSpPr txBox="1"/>
+              <p:nvPr/>
+            </p:nvSpPr>
+            <p:spPr>
+              <a:xfrm>
+                <a:off x="639917" y="4125525"/>
+                <a:ext cx="10912162" cy="1477328"/>
+              </a:xfrm>
+              <a:prstGeom prst="rect">
+                <a:avLst/>
+              </a:prstGeom>
+              <a:noFill/>
+            </p:spPr>
+            <p:txBody>
+              <a:bodyPr wrap="square" rtlCol="0">
+                <a:spAutoFit/>
+              </a:bodyPr>
+              <a:lstStyle/>
+              <a:p>
+                <a:r>
+                  <a:rPr lang="en-PH" sz="3000" dirty="0"/>
+                  <a:t>Total sample size N = 3 × 5 = 15 </a:t>
+                </a:r>
+              </a:p>
+              <a:p>
+                <a:r>
+                  <a:rPr lang="en-PH" sz="3000" dirty="0"/>
+                  <a:t>Numerator </a:t>
+                </a:r>
+                <a:r>
+                  <a:rPr lang="en-PH" sz="3000" dirty="0" err="1"/>
+                  <a:t>df</a:t>
+                </a:r>
+                <a:r>
+                  <a:rPr lang="en-PH" sz="3000" dirty="0"/>
+                  <a:t> (between groups) </a:t>
+                </a:r>
+                <a14:m>
+                  <m:oMath xmlns:m="http://schemas.openxmlformats.org/officeDocument/2006/math">
+                    <m:r>
+                      <a:rPr lang="en-PH" sz="3000" i="1" dirty="0" smtClean="0">
+                        <a:latin typeface="Cambria Math" panose="02040503050406030204" pitchFamily="18" charset="0"/>
+                      </a:rPr>
+                      <m:t>𝑑𝑓</m:t>
+                    </m:r>
+                    <m:r>
+                      <a:rPr lang="en-PH" sz="3000" i="1" dirty="0">
+                        <a:latin typeface="Cambria Math" panose="02040503050406030204" pitchFamily="18" charset="0"/>
+                      </a:rPr>
+                      <m:t>1=</m:t>
+                    </m:r>
+                    <m:r>
+                      <a:rPr lang="en-PH" sz="3000" i="1" dirty="0">
+                        <a:latin typeface="Cambria Math" panose="02040503050406030204" pitchFamily="18" charset="0"/>
+                      </a:rPr>
+                      <m:t>𝑘</m:t>
+                    </m:r>
+                    <m:r>
+                      <a:rPr lang="en-PH" sz="3000" i="1" dirty="0">
+                        <a:latin typeface="Cambria Math" panose="02040503050406030204" pitchFamily="18" charset="0"/>
+                      </a:rPr>
+                      <m:t>−1=3−1=2 </m:t>
+                    </m:r>
+                  </m:oMath>
+                </a14:m>
+              </a:p>
+              <a:p>
+                <a:r>
+                  <a:rPr lang="en-PH" sz="3000" dirty="0"/>
+                  <a:t>Denominator </a:t>
+                </a:r>
+                <a:r>
+                  <a:rPr lang="en-PH" sz="3000" dirty="0" err="1"/>
+                  <a:t>df</a:t>
+                </a:r>
+                <a:r>
+                  <a:rPr lang="en-PH" sz="3000" dirty="0"/>
+                  <a:t> (within groups) </a:t>
+                </a:r>
+                <a14:m>
+                  <m:oMath xmlns:m="http://schemas.openxmlformats.org/officeDocument/2006/math">
+                    <m:r>
+                      <a:rPr lang="en-PH" sz="3000" i="1" dirty="0" smtClean="0">
+                        <a:latin typeface="Cambria Math" panose="02040503050406030204" pitchFamily="18" charset="0"/>
+                      </a:rPr>
+                      <m:t>𝑑𝑓</m:t>
+                    </m:r>
+                    <m:r>
+                      <a:rPr lang="en-PH" sz="3000" i="1" dirty="0">
+                        <a:latin typeface="Cambria Math" panose="02040503050406030204" pitchFamily="18" charset="0"/>
+                      </a:rPr>
+                      <m:t>2=</m:t>
+                    </m:r>
+                    <m:r>
+                      <a:rPr lang="en-PH" sz="3000" i="1" dirty="0">
+                        <a:latin typeface="Cambria Math" panose="02040503050406030204" pitchFamily="18" charset="0"/>
+                      </a:rPr>
+                      <m:t>𝑁</m:t>
+                    </m:r>
+                    <m:r>
+                      <a:rPr lang="en-PH" sz="3000" i="1" dirty="0">
+                        <a:latin typeface="Cambria Math" panose="02040503050406030204" pitchFamily="18" charset="0"/>
+                      </a:rPr>
+                      <m:t>−</m:t>
+                    </m:r>
+                    <m:r>
+                      <a:rPr lang="en-PH" sz="3000" i="1" dirty="0">
+                        <a:latin typeface="Cambria Math" panose="02040503050406030204" pitchFamily="18" charset="0"/>
+                      </a:rPr>
+                      <m:t>𝑘</m:t>
+                    </m:r>
+                    <m:r>
+                      <a:rPr lang="en-PH" sz="3000" i="1" dirty="0">
+                        <a:latin typeface="Cambria Math" panose="02040503050406030204" pitchFamily="18" charset="0"/>
+                      </a:rPr>
+                      <m:t>=15−3=12</m:t>
+                    </m:r>
+                  </m:oMath>
+                </a14:m>
+                <a:endParaRPr lang="en-PH" sz="3000" dirty="0"/>
+              </a:p>
+            </p:txBody>
+          </p:sp>
+        </mc:Choice>
+        <mc:Fallback>
+          <p:sp>
+            <p:nvSpPr>
+              <p:cNvPr id="10" name="TextBox 9">
+                <a:extLst>
+                  <a:ext uri="{FF2B5EF4-FFF2-40B4-BE49-F238E27FC236}">
+                    <a16:creationId xmlns:a16="http://schemas.microsoft.com/office/drawing/2014/main" id="{D4259C0B-CDAB-D03B-66A4-B501E1A7F801}"/>
+                  </a:ext>
+                </a:extLst>
+              </p:cNvPr>
+              <p:cNvSpPr txBox="1">
+                <a:spLocks noRot="1" noChangeAspect="1" noMove="1" noResize="1" noEditPoints="1" noAdjustHandles="1" noChangeArrowheads="1" noChangeShapeType="1" noTextEdit="1"/>
+              </p:cNvSpPr>
+              <p:nvPr/>
+            </p:nvSpPr>
+            <p:spPr>
+              <a:xfrm>
+                <a:off x="639917" y="4125525"/>
+                <a:ext cx="10912162" cy="1477328"/>
+              </a:xfrm>
+              <a:prstGeom prst="rect">
+                <a:avLst/>
+              </a:prstGeom>
+              <a:blipFill>
+                <a:blip r:embed="rId4"/>
+                <a:stretch>
+                  <a:fillRect l="-1279" t="-4237" b="-11017"/>
+                </a:stretch>
+              </a:blipFill>
+            </p:spPr>
+            <p:txBody>
+              <a:bodyPr/>
+              <a:lstStyle/>
+              <a:p>
+                <a:r>
+                  <a:rPr lang="en-US">
+                    <a:noFill/>
+                  </a:rPr>
+                  <a:t> </a:t>
+                </a:r>
+              </a:p>
+            </p:txBody>
+          </p:sp>
+        </mc:Fallback>
+      </mc:AlternateContent>
+      <p:pic>
+        <p:nvPicPr>
+          <p:cNvPr id="3" name="Picture 2">
+            <a:extLst>
+              <a:ext uri="{FF2B5EF4-FFF2-40B4-BE49-F238E27FC236}">
+                <a16:creationId xmlns:a16="http://schemas.microsoft.com/office/drawing/2014/main" id="{2B9F22CA-53F0-D60D-C545-15852D946E66}"/>
+              </a:ext>
+            </a:extLst>
+          </p:cNvPr>
+          <p:cNvPicPr>
+            <a:picLocks noChangeAspect="1"/>
+          </p:cNvPicPr>
+          <p:nvPr/>
+        </p:nvPicPr>
+        <p:blipFill>
+          <a:blip r:embed="rId5">
+            <a:extLst>
+              <a:ext uri="{28A0092B-C50C-407E-A947-70E740481C1C}">
+                <a14:useLocalDpi xmlns:a14="http://schemas.microsoft.com/office/drawing/2010/main" val="0"/>
+              </a:ext>
+            </a:extLst>
+          </a:blip>
+          <a:stretch>
+            <a:fillRect/>
+          </a:stretch>
+        </p:blipFill>
+        <p:spPr>
+          <a:xfrm>
+            <a:off x="8578701" y="1021740"/>
+            <a:ext cx="601057" cy="645580"/>
+          </a:xfrm>
+          <a:prstGeom prst="rect">
+            <a:avLst/>
+          </a:prstGeom>
+        </p:spPr>
+      </p:pic>
+      <p:pic>
+        <p:nvPicPr>
+          <p:cNvPr id="4" name="Picture 3">
+            <a:extLst>
+              <a:ext uri="{FF2B5EF4-FFF2-40B4-BE49-F238E27FC236}">
+                <a16:creationId xmlns:a16="http://schemas.microsoft.com/office/drawing/2014/main" id="{66EF6A38-BE10-2395-937B-32461BB4D226}"/>
+              </a:ext>
+            </a:extLst>
+          </p:cNvPr>
+          <p:cNvPicPr>
+            <a:picLocks noChangeAspect="1"/>
+          </p:cNvPicPr>
+          <p:nvPr/>
+        </p:nvPicPr>
+        <p:blipFill>
+          <a:blip r:embed="rId6">
+            <a:extLst>
+              <a:ext uri="{28A0092B-C50C-407E-A947-70E740481C1C}">
+                <a14:useLocalDpi xmlns:a14="http://schemas.microsoft.com/office/drawing/2010/main" val="0"/>
+              </a:ext>
+            </a:extLst>
+          </a:blip>
+          <a:stretch>
+            <a:fillRect/>
+          </a:stretch>
+        </p:blipFill>
+        <p:spPr>
+          <a:xfrm>
+            <a:off x="5773210" y="991256"/>
+            <a:ext cx="645579" cy="645579"/>
+          </a:xfrm>
+          <a:prstGeom prst="rect">
+            <a:avLst/>
+          </a:prstGeom>
+        </p:spPr>
+      </p:pic>
+      <p:pic>
+        <p:nvPicPr>
+          <p:cNvPr id="6" name="Picture 5">
+            <a:extLst>
+              <a:ext uri="{FF2B5EF4-FFF2-40B4-BE49-F238E27FC236}">
+                <a16:creationId xmlns:a16="http://schemas.microsoft.com/office/drawing/2014/main" id="{F96D2F00-AF85-FA98-A859-4B126D552146}"/>
+              </a:ext>
+            </a:extLst>
+          </p:cNvPr>
+          <p:cNvPicPr>
+            <a:picLocks noChangeAspect="1"/>
+          </p:cNvPicPr>
+          <p:nvPr/>
+        </p:nvPicPr>
+        <p:blipFill>
+          <a:blip r:embed="rId7">
+            <a:extLst>
+              <a:ext uri="{28A0092B-C50C-407E-A947-70E740481C1C}">
+                <a14:useLocalDpi xmlns:a14="http://schemas.microsoft.com/office/drawing/2010/main" val="0"/>
+              </a:ext>
+            </a:extLst>
+          </a:blip>
+          <a:stretch>
+            <a:fillRect/>
+          </a:stretch>
+        </p:blipFill>
+        <p:spPr>
+          <a:xfrm>
+            <a:off x="3056145" y="960774"/>
+            <a:ext cx="772578" cy="706545"/>
+          </a:xfrm>
+          <a:prstGeom prst="rect">
+            <a:avLst/>
+          </a:prstGeom>
+        </p:spPr>
+      </p:pic>
+    </p:spTree>
+    <p:extLst>
+      <p:ext uri="{BB962C8B-B14F-4D97-AF65-F5344CB8AC3E}">
+        <p14:creationId xmlns:p14="http://schemas.microsoft.com/office/powerpoint/2010/main" val="1604800055"/>
+      </p:ext>
+    </p:extLst>
+  </p:cSld>
+  <p:clrMapOvr>
+    <a:masterClrMapping/>
+  </p:clrMapOvr>
+  <p:timing>
+    <p:tnLst>
+      <p:par>
+        <p:cTn id="1" dur="indefinite" restart="never" nodeType="tmRoot">
+          <p:childTnLst>
+            <p:seq concurrent="1" nextAc="seek">
+              <p:cTn id="2" dur="indefinite" nodeType="mainSeq">
+                <p:childTnLst>
+                  <p:par>
+                    <p:cTn id="3" fill="hold">
+                      <p:stCondLst>
+                        <p:cond delay="indefinite"/>
+                      </p:stCondLst>
+                      <p:childTnLst>
+                        <p:par>
+                          <p:cTn id="4" fill="hold">
+                            <p:stCondLst>
+                              <p:cond delay="0"/>
+                            </p:stCondLst>
+                            <p:childTnLst>
+                              <p:par>
+                                <p:cTn id="5" presetID="2" presetClass="entr" presetSubtype="4" fill="hold" grpId="0" nodeType="clickEffect">
+                                  <p:stCondLst>
+                                    <p:cond delay="0"/>
+                                  </p:stCondLst>
+                                  <p:childTnLst>
+                                    <p:set>
+                                      <p:cBhvr>
+                                        <p:cTn id="6" dur="1" fill="hold">
+                                          <p:stCondLst>
+                                            <p:cond delay="0"/>
+                                          </p:stCondLst>
+                                        </p:cTn>
+                                        <p:tgtEl>
+                                          <p:spTgt spid="10"/>
+                                        </p:tgtEl>
+                                        <p:attrNameLst>
+                                          <p:attrName>style.visibility</p:attrName>
+                                        </p:attrNameLst>
+                                      </p:cBhvr>
+                                      <p:to>
+                                        <p:strVal val="visible"/>
+                                      </p:to>
+                                    </p:set>
+                                    <p:anim calcmode="lin" valueType="num">
+                                      <p:cBhvr additive="base">
+                                        <p:cTn id="7" dur="500" fill="hold"/>
+                                        <p:tgtEl>
+                                          <p:spTgt spid="10"/>
+                                        </p:tgtEl>
+                                        <p:attrNameLst>
+                                          <p:attrName>ppt_x</p:attrName>
+                                        </p:attrNameLst>
+                                      </p:cBhvr>
+                                      <p:tavLst>
+                                        <p:tav tm="0">
+                                          <p:val>
+                                            <p:strVal val="#ppt_x"/>
+                                          </p:val>
+                                        </p:tav>
+                                        <p:tav tm="100000">
+                                          <p:val>
+                                            <p:strVal val="#ppt_x"/>
+                                          </p:val>
+                                        </p:tav>
+                                      </p:tavLst>
+                                    </p:anim>
+                                    <p:anim calcmode="lin" valueType="num">
+                                      <p:cBhvr additive="base">
+                                        <p:cTn id="8" dur="500" fill="hold"/>
+                                        <p:tgtEl>
+                                          <p:spTgt spid="10"/>
+                                        </p:tgtEl>
+                                        <p:attrNameLst>
+                                          <p:attrName>ppt_y</p:attrName>
+                                        </p:attrNameLst>
+                                      </p:cBhvr>
+                                      <p:tavLst>
+                                        <p:tav tm="0">
+                                          <p:val>
+                                            <p:strVal val="1+#ppt_h/2"/>
+                                          </p:val>
+                                        </p:tav>
+                                        <p:tav tm="100000">
+                                          <p:val>
+                                            <p:strVal val="#ppt_y"/>
+                                          </p:val>
+                                        </p:tav>
+                                      </p:tavLst>
+                                    </p:anim>
+                                  </p:childTnLst>
+                                </p:cTn>
+                              </p:par>
+                            </p:childTnLst>
+                          </p:cTn>
+                        </p:par>
+                      </p:childTnLst>
+                    </p:cTn>
+                  </p:par>
+                </p:childTnLst>
+              </p:cTn>
+              <p:prevCondLst>
+                <p:cond evt="onPrev" delay="0">
+                  <p:tgtEl>
+                    <p:sldTgt/>
+                  </p:tgtEl>
+                </p:cond>
+              </p:prevCondLst>
+              <p:nextCondLst>
+                <p:cond evt="onNext" delay="0">
+                  <p:tgtEl>
+                    <p:sldTgt/>
+                  </p:tgtEl>
+                </p:cond>
+              </p:nextCondLst>
+            </p:seq>
+          </p:childTnLst>
+        </p:cTn>
+      </p:par>
+    </p:tnLst>
+    <p:bldLst>
+      <p:bldP spid="10" grpId="0"/>
+    </p:bldLst>
+  </p:timing>
+</p:sld>
+</file>
+
+<file path=ppt/slides/slide21.xml><?xml version="1.0" encoding="utf-8"?>
 <p:sld xmlns:a="http://schemas.openxmlformats.org/drawingml/2006/main" xmlns:r="http://schemas.openxmlformats.org/officeDocument/2006/relationships" xmlns:p="http://schemas.openxmlformats.org/presentationml/2006/main">
   <p:cSld>
     <p:bg>
@@ -18925,7 +19994,261 @@
 </p:sld>
 </file>
 
-<file path=ppt/slides/slide21.xml><?xml version="1.0" encoding="utf-8"?>
+<file path=ppt/slides/slide22.xml><?xml version="1.0" encoding="utf-8"?>
+<p:sld xmlns:a="http://schemas.openxmlformats.org/drawingml/2006/main" xmlns:r="http://schemas.openxmlformats.org/officeDocument/2006/relationships" xmlns:p="http://schemas.openxmlformats.org/presentationml/2006/main">
+  <p:cSld>
+    <p:spTree>
+      <p:nvGrpSpPr>
+        <p:cNvPr id="1" name=""/>
+        <p:cNvGrpSpPr/>
+        <p:nvPr/>
+      </p:nvGrpSpPr>
+      <p:grpSpPr>
+        <a:xfrm>
+          <a:off x="0" y="0"/>
+          <a:ext cx="0" cy="0"/>
+          <a:chOff x="0" y="0"/>
+          <a:chExt cx="0" cy="0"/>
+        </a:xfrm>
+      </p:grpSpPr>
+      <p:pic>
+        <p:nvPicPr>
+          <p:cNvPr id="15" name="Picture 14" descr="A table of numbers and a number&#10;&#10;AI-generated content may be incorrect.">
+            <a:extLst>
+              <a:ext uri="{FF2B5EF4-FFF2-40B4-BE49-F238E27FC236}">
+                <a16:creationId xmlns:a16="http://schemas.microsoft.com/office/drawing/2014/main" id="{24621DA3-8AEC-EF39-18F0-1E9DEC756A77}"/>
+              </a:ext>
+            </a:extLst>
+          </p:cNvPr>
+          <p:cNvPicPr>
+            <a:picLocks noChangeAspect="1"/>
+          </p:cNvPicPr>
+          <p:nvPr/>
+        </p:nvPicPr>
+        <p:blipFill>
+          <a:blip r:embed="rId2">
+            <a:extLst>
+              <a:ext uri="{28A0092B-C50C-407E-A947-70E740481C1C}">
+                <a14:useLocalDpi xmlns:a14="http://schemas.microsoft.com/office/drawing/2010/main" val="0"/>
+              </a:ext>
+            </a:extLst>
+          </a:blip>
+          <a:stretch>
+            <a:fillRect/>
+          </a:stretch>
+        </p:blipFill>
+        <p:spPr>
+          <a:xfrm>
+            <a:off x="2209800" y="775918"/>
+            <a:ext cx="7774305" cy="4125600"/>
+          </a:xfrm>
+          <a:prstGeom prst="rect">
+            <a:avLst/>
+          </a:prstGeom>
+        </p:spPr>
+      </p:pic>
+    </p:spTree>
+    <p:extLst>
+      <p:ext uri="{BB962C8B-B14F-4D97-AF65-F5344CB8AC3E}">
+        <p14:creationId xmlns:p14="http://schemas.microsoft.com/office/powerpoint/2010/main" val="4185670383"/>
+      </p:ext>
+    </p:extLst>
+  </p:cSld>
+  <p:clrMapOvr>
+    <a:masterClrMapping/>
+  </p:clrMapOvr>
+</p:sld>
+</file>
+
+<file path=ppt/slides/slide23.xml><?xml version="1.0" encoding="utf-8"?>
+<p:sld xmlns:a="http://schemas.openxmlformats.org/drawingml/2006/main" xmlns:r="http://schemas.openxmlformats.org/officeDocument/2006/relationships" xmlns:p="http://schemas.openxmlformats.org/presentationml/2006/main">
+  <p:cSld>
+    <p:spTree>
+      <p:nvGrpSpPr>
+        <p:cNvPr id="1" name="">
+          <a:extLst>
+            <a:ext uri="{FF2B5EF4-FFF2-40B4-BE49-F238E27FC236}">
+              <a16:creationId xmlns:a16="http://schemas.microsoft.com/office/drawing/2014/main" id="{65AC7E30-AA44-CAC0-BD6E-248A8D8EBA84}"/>
+            </a:ext>
+          </a:extLst>
+        </p:cNvPr>
+        <p:cNvGrpSpPr/>
+        <p:nvPr/>
+      </p:nvGrpSpPr>
+      <p:grpSpPr>
+        <a:xfrm>
+          <a:off x="0" y="0"/>
+          <a:ext cx="0" cy="0"/>
+          <a:chOff x="0" y="0"/>
+          <a:chExt cx="0" cy="0"/>
+        </a:xfrm>
+      </p:grpSpPr>
+      <p:pic>
+        <p:nvPicPr>
+          <p:cNvPr id="15" name="Picture 14" descr="A table of numbers and a number&#10;&#10;AI-generated content may be incorrect.">
+            <a:extLst>
+              <a:ext uri="{FF2B5EF4-FFF2-40B4-BE49-F238E27FC236}">
+                <a16:creationId xmlns:a16="http://schemas.microsoft.com/office/drawing/2014/main" id="{D1DBC290-1E80-3293-3858-8DB400D4D40B}"/>
+              </a:ext>
+            </a:extLst>
+          </p:cNvPr>
+          <p:cNvPicPr>
+            <a:picLocks noChangeAspect="1"/>
+          </p:cNvPicPr>
+          <p:nvPr/>
+        </p:nvPicPr>
+        <p:blipFill>
+          <a:blip r:embed="rId2">
+            <a:extLst>
+              <a:ext uri="{28A0092B-C50C-407E-A947-70E740481C1C}">
+                <a14:useLocalDpi xmlns:a14="http://schemas.microsoft.com/office/drawing/2010/main" val="0"/>
+              </a:ext>
+            </a:extLst>
+          </a:blip>
+          <a:stretch>
+            <a:fillRect/>
+          </a:stretch>
+        </p:blipFill>
+        <p:spPr>
+          <a:xfrm>
+            <a:off x="1873770" y="584616"/>
+            <a:ext cx="20351585" cy="10800000"/>
+          </a:xfrm>
+          <a:prstGeom prst="rect">
+            <a:avLst/>
+          </a:prstGeom>
+        </p:spPr>
+      </p:pic>
+      <p:sp>
+        <p:nvSpPr>
+          <p:cNvPr id="2" name="Rectangle 1">
+            <a:extLst>
+              <a:ext uri="{FF2B5EF4-FFF2-40B4-BE49-F238E27FC236}">
+                <a16:creationId xmlns:a16="http://schemas.microsoft.com/office/drawing/2014/main" id="{726912EE-0215-4B5B-2A63-81C49D29B9EA}"/>
+              </a:ext>
+            </a:extLst>
+          </p:cNvPr>
+          <p:cNvSpPr/>
+          <p:nvPr/>
+        </p:nvSpPr>
+        <p:spPr>
+          <a:xfrm>
+            <a:off x="4197246" y="1311640"/>
+            <a:ext cx="1019331" cy="4549514"/>
+          </a:xfrm>
+          <a:prstGeom prst="rect">
+            <a:avLst/>
+          </a:prstGeom>
+          <a:noFill/>
+          <a:ln w="57150">
+            <a:solidFill>
+              <a:srgbClr val="00B050"/>
+            </a:solidFill>
+          </a:ln>
+        </p:spPr>
+        <p:style>
+          <a:lnRef idx="2">
+            <a:schemeClr val="accent1">
+              <a:shade val="15000"/>
+            </a:schemeClr>
+          </a:lnRef>
+          <a:fillRef idx="1">
+            <a:schemeClr val="accent1"/>
+          </a:fillRef>
+          <a:effectRef idx="0">
+            <a:schemeClr val="accent1"/>
+          </a:effectRef>
+          <a:fontRef idx="minor">
+            <a:schemeClr val="lt1"/>
+          </a:fontRef>
+        </p:style>
+        <p:txBody>
+          <a:bodyPr rtlCol="0" anchor="ctr"/>
+          <a:lstStyle/>
+          <a:p>
+            <a:pPr algn="ctr"/>
+            <a:endParaRPr lang="en-US"/>
+          </a:p>
+        </p:txBody>
+      </p:sp>
+      <p:sp>
+        <p:nvSpPr>
+          <p:cNvPr id="3" name="Rectangle 2">
+            <a:extLst>
+              <a:ext uri="{FF2B5EF4-FFF2-40B4-BE49-F238E27FC236}">
+                <a16:creationId xmlns:a16="http://schemas.microsoft.com/office/drawing/2014/main" id="{A315EF8F-5A6E-F9CB-4025-8CEC84ECA44A}"/>
+              </a:ext>
+            </a:extLst>
+          </p:cNvPr>
+          <p:cNvSpPr/>
+          <p:nvPr/>
+        </p:nvSpPr>
+        <p:spPr>
+          <a:xfrm>
+            <a:off x="1873770" y="5546360"/>
+            <a:ext cx="3342807" cy="314794"/>
+          </a:xfrm>
+          <a:prstGeom prst="rect">
+            <a:avLst/>
+          </a:prstGeom>
+          <a:noFill/>
+          <a:ln w="57150">
+            <a:solidFill>
+              <a:srgbClr val="00B050"/>
+            </a:solidFill>
+          </a:ln>
+        </p:spPr>
+        <p:style>
+          <a:lnRef idx="2">
+            <a:schemeClr val="accent1">
+              <a:shade val="15000"/>
+            </a:schemeClr>
+          </a:lnRef>
+          <a:fillRef idx="1">
+            <a:schemeClr val="accent1"/>
+          </a:fillRef>
+          <a:effectRef idx="0">
+            <a:schemeClr val="accent1"/>
+          </a:effectRef>
+          <a:fontRef idx="minor">
+            <a:schemeClr val="lt1"/>
+          </a:fontRef>
+        </p:style>
+        <p:txBody>
+          <a:bodyPr rtlCol="0" anchor="ctr"/>
+          <a:lstStyle/>
+          <a:p>
+            <a:pPr algn="ctr"/>
+            <a:endParaRPr lang="en-US"/>
+          </a:p>
+        </p:txBody>
+      </p:sp>
+    </p:spTree>
+    <p:extLst>
+      <p:ext uri="{BB962C8B-B14F-4D97-AF65-F5344CB8AC3E}">
+        <p14:creationId xmlns:p14="http://schemas.microsoft.com/office/powerpoint/2010/main" val="773524162"/>
+      </p:ext>
+    </p:extLst>
+  </p:cSld>
+  <p:clrMapOvr>
+    <a:masterClrMapping/>
+  </p:clrMapOvr>
+  <mc:AlternateContent xmlns:mc="http://schemas.openxmlformats.org/markup-compatibility/2006">
+    <mc:Choice xmlns:p159="http://schemas.microsoft.com/office/powerpoint/2015/09/main" Requires="p159">
+      <p:transition xmlns:p14="http://schemas.microsoft.com/office/powerpoint/2010/main" spd="slow" p14:dur="2000">
+        <p159:morph option="byObject"/>
+      </p:transition>
+    </mc:Choice>
+    <mc:Fallback>
+      <p:transition spd="slow">
+        <p:fade/>
+      </p:transition>
+    </mc:Fallback>
+  </mc:AlternateContent>
+</p:sld>
+</file>
+
+<file path=ppt/slides/slide24.xml><?xml version="1.0" encoding="utf-8"?>
 <p:sld xmlns:a="http://schemas.openxmlformats.org/drawingml/2006/main" xmlns:r="http://schemas.openxmlformats.org/officeDocument/2006/relationships" xmlns:p="http://schemas.openxmlformats.org/presentationml/2006/main">
   <p:cSld>
     <p:bg>
@@ -19753,7 +21076,7 @@
 </p:sld>
 </file>
 
-<file path=ppt/slides/slide22.xml><?xml version="1.0" encoding="utf-8"?>
+<file path=ppt/slides/slide25.xml><?xml version="1.0" encoding="utf-8"?>
 <p:sld xmlns:a="http://schemas.openxmlformats.org/drawingml/2006/main" xmlns:r="http://schemas.openxmlformats.org/officeDocument/2006/relationships" xmlns:p="http://schemas.openxmlformats.org/presentationml/2006/main">
   <p:cSld>
     <p:bg>
@@ -20452,7 +21775,7 @@
 </p:sld>
 </file>
 
-<file path=ppt/slides/slide23.xml><?xml version="1.0" encoding="utf-8"?>
+<file path=ppt/slides/slide26.xml><?xml version="1.0" encoding="utf-8"?>
 <p:sld xmlns:a="http://schemas.openxmlformats.org/drawingml/2006/main" xmlns:r="http://schemas.openxmlformats.org/officeDocument/2006/relationships" xmlns:p="http://schemas.openxmlformats.org/presentationml/2006/main">
   <p:cSld>
     <p:bg>
@@ -20725,7 +22048,7 @@
 </p:sld>
 </file>
 
-<file path=ppt/slides/slide24.xml><?xml version="1.0" encoding="utf-8"?>
+<file path=ppt/slides/slide27.xml><?xml version="1.0" encoding="utf-8"?>
 <p:sld xmlns:a="http://schemas.openxmlformats.org/drawingml/2006/main" xmlns:r="http://schemas.openxmlformats.org/officeDocument/2006/relationships" xmlns:p="http://schemas.openxmlformats.org/presentationml/2006/main">
   <p:cSld>
     <p:bg>
@@ -20998,7 +22321,7 @@
 </p:sld>
 </file>
 
-<file path=ppt/slides/slide25.xml><?xml version="1.0" encoding="utf-8"?>
+<file path=ppt/slides/slide28.xml><?xml version="1.0" encoding="utf-8"?>
 <p:sld xmlns:a="http://schemas.openxmlformats.org/drawingml/2006/main" xmlns:r="http://schemas.openxmlformats.org/officeDocument/2006/relationships" xmlns:p="http://schemas.openxmlformats.org/presentationml/2006/main">
   <p:cSld>
     <p:bg>
@@ -22526,7 +23849,7 @@
 </p:sld>
 </file>
 
-<file path=ppt/slides/slide26.xml><?xml version="1.0" encoding="utf-8"?>
+<file path=ppt/slides/slide29.xml><?xml version="1.0" encoding="utf-8"?>
 <p:sld xmlns:a="http://schemas.openxmlformats.org/drawingml/2006/main" xmlns:r="http://schemas.openxmlformats.org/officeDocument/2006/relationships" xmlns:p="http://schemas.openxmlformats.org/presentationml/2006/main">
   <p:cSld>
     <p:bg>
@@ -26608,6 +27931,15 @@
 </file>
 
 <file path=customXml/item1.xml><?xml version="1.0" encoding="utf-8"?>
+<?mso-contentType ?>
+<FormTemplates xmlns="http://schemas.microsoft.com/sharepoint/v3/contenttype/forms">
+  <Display>DocumentLibraryForm</Display>
+  <Edit>DocumentLibraryForm</Edit>
+  <New>DocumentLibraryForm</New>
+</FormTemplates>
+</file>
+
+<file path=customXml/item2.xml><?xml version="1.0" encoding="utf-8"?>
 <ct:contentTypeSchema xmlns:ct="http://schemas.microsoft.com/office/2006/metadata/contentType" xmlns:ma="http://schemas.microsoft.com/office/2006/metadata/properties/metaAttributes" ct:_="" ma:_="" ma:contentTypeName="Document" ma:contentTypeID="0x0101007188BDCA587B344BBA6CB1A93FAE6998" ma:contentTypeVersion="2" ma:contentTypeDescription="Create a new document." ma:contentTypeScope="" ma:versionID="7a8e4b6720badb2566a0cfeddfaf2856">
   <xsd:schema xmlns:xsd="http://www.w3.org/2001/XMLSchema" xmlns:xs="http://www.w3.org/2001/XMLSchema" xmlns:p="http://schemas.microsoft.com/office/2006/metadata/properties" xmlns:ns2="ba111d12-426d-4af0-bcb6-460e36974645" targetNamespace="http://schemas.microsoft.com/office/2006/metadata/properties" ma:root="true" ma:fieldsID="989b05398519136c88ba0a8d54e3c3da" ns2:_="">
     <xsd:import namespace="ba111d12-426d-4af0-bcb6-460e36974645"/>
@@ -26739,15 +28071,6 @@
 </ct:contentTypeSchema>
 </file>
 
-<file path=customXml/item2.xml><?xml version="1.0" encoding="utf-8"?>
-<?mso-contentType ?>
-<FormTemplates xmlns="http://schemas.microsoft.com/sharepoint/v3/contenttype/forms">
-  <Display>DocumentLibraryForm</Display>
-  <Edit>DocumentLibraryForm</Edit>
-  <New>DocumentLibraryForm</New>
-</FormTemplates>
-</file>
-
 <file path=customXml/item3.xml><?xml version="1.0" encoding="utf-8"?>
 <p:properties xmlns:p="http://schemas.microsoft.com/office/2006/metadata/properties" xmlns:xsi="http://www.w3.org/2001/XMLSchema-instance" xmlns:pc="http://schemas.microsoft.com/office/infopath/2007/PartnerControls">
   <documentManagement/>
@@ -26755,6 +28078,14 @@
 </file>
 
 <file path=customXml/itemProps1.xml><?xml version="1.0" encoding="utf-8"?>
+<ds:datastoreItem xmlns:ds="http://schemas.openxmlformats.org/officeDocument/2006/customXml" ds:itemID="{651370AF-26B9-4AFA-BA9D-5D4A7E1A6722}">
+  <ds:schemaRefs>
+    <ds:schemaRef ds:uri="http://schemas.microsoft.com/sharepoint/v3/contenttype/forms"/>
+  </ds:schemaRefs>
+</ds:datastoreItem>
+</file>
+
+<file path=customXml/itemProps2.xml><?xml version="1.0" encoding="utf-8"?>
 <ds:datastoreItem xmlns:ds="http://schemas.openxmlformats.org/officeDocument/2006/customXml" ds:itemID="{3D61E20B-708A-4719-8C02-DA91A478A7AB}">
   <ds:schemaRefs>
     <ds:schemaRef ds:uri="http://schemas.microsoft.com/office/2006/metadata/contentType"/>
@@ -26772,14 +28103,6 @@
 </ds:datastoreItem>
 </file>
 
-<file path=customXml/itemProps2.xml><?xml version="1.0" encoding="utf-8"?>
-<ds:datastoreItem xmlns:ds="http://schemas.openxmlformats.org/officeDocument/2006/customXml" ds:itemID="{651370AF-26B9-4AFA-BA9D-5D4A7E1A6722}">
-  <ds:schemaRefs>
-    <ds:schemaRef ds:uri="http://schemas.microsoft.com/sharepoint/v3/contenttype/forms"/>
-  </ds:schemaRefs>
-</ds:datastoreItem>
-</file>
-
 <file path=customXml/itemProps3.xml><?xml version="1.0" encoding="utf-8"?>
 <ds:datastoreItem xmlns:ds="http://schemas.openxmlformats.org/officeDocument/2006/customXml" ds:itemID="{EA3362E2-FA54-4262-AE94-2FA98FF8142D}">
   <ds:schemaRefs>
